--- a/docs/training/Fameline-Dock-Queue-อบรมผู้ใช้งาน.pptx
+++ b/docs/training/Fameline-Dock-Queue-อบรมผู้ใช้งาน.pptx
@@ -2,25 +2,25 @@
 <file path=ppt/presentation.xml><?xml version="1.0" encoding="utf-8"?>
 <p:presentation xmlns:a="http://schemas.openxmlformats.org/drawingml/2006/main" xmlns:r="http://schemas.openxmlformats.org/officeDocument/2006/relationships" xmlns:p="http://schemas.openxmlformats.org/presentationml/2006/main" saveSubsetFonts="1" autoCompressPictures="0">
   <p:sldMasterIdLst>
-    <p:sldMasterId id="2147483650" r:id="rId1"/>
+    <p:sldMasterId id="2147483655" r:id="rId1"/>
   </p:sldMasterIdLst>
   <p:notesMasterIdLst>
     <p:notesMasterId r:id="rId31"/>
   </p:notesMasterIdLst>
   <p:sldIdLst>
-    <p:sldId id="285" r:id="rId2"/>
+    <p:sldId id="304" r:id="rId2"/>
     <p:sldId id="286" r:id="rId3"/>
     <p:sldId id="258" r:id="rId4"/>
     <p:sldId id="287" r:id="rId5"/>
     <p:sldId id="260" r:id="rId6"/>
-    <p:sldId id="261" r:id="rId7"/>
-    <p:sldId id="262" r:id="rId8"/>
+    <p:sldId id="296" r:id="rId7"/>
+    <p:sldId id="305" r:id="rId8"/>
     <p:sldId id="263" r:id="rId9"/>
     <p:sldId id="264" r:id="rId10"/>
-    <p:sldId id="265" r:id="rId11"/>
+    <p:sldId id="306" r:id="rId11"/>
     <p:sldId id="266" r:id="rId12"/>
     <p:sldId id="267" r:id="rId13"/>
-    <p:sldId id="268" r:id="rId14"/>
+    <p:sldId id="307" r:id="rId14"/>
     <p:sldId id="269" r:id="rId15"/>
     <p:sldId id="288" r:id="rId16"/>
     <p:sldId id="271" r:id="rId17"/>
@@ -28,15 +28,15 @@
     <p:sldId id="292" r:id="rId19"/>
     <p:sldId id="289" r:id="rId20"/>
     <p:sldId id="275" r:id="rId21"/>
-    <p:sldId id="276" r:id="rId22"/>
+    <p:sldId id="308" r:id="rId22"/>
     <p:sldId id="277" r:id="rId23"/>
     <p:sldId id="290" r:id="rId24"/>
     <p:sldId id="279" r:id="rId25"/>
-    <p:sldId id="280" r:id="rId26"/>
+    <p:sldId id="309" r:id="rId26"/>
     <p:sldId id="281" r:id="rId27"/>
     <p:sldId id="291" r:id="rId28"/>
     <p:sldId id="283" r:id="rId29"/>
-    <p:sldId id="284" r:id="rId30"/>
+    <p:sldId id="310" r:id="rId30"/>
   </p:sldIdLst>
   <p:sldSz cx="12192000" cy="6858000"/>
   <p:notesSz cx="6858000" cy="12192000"/>
@@ -137,27 +137,27 @@
       <p14:sectionLst xmlns:p14="http://schemas.microsoft.com/office/powerpoint/2010/main">
         <p14:section name="ภาพรวม" id="{67A6A93E-AD7F-AB8C-015E-45877195CB48}">
           <p14:sldIdLst>
-            <p14:sldId id="285"/>
+            <p14:sldId id="304"/>
             <p14:sldId id="286"/>
             <p14:sldId id="258"/>
             <p14:sldId id="287"/>
             <p14:sldId id="260"/>
-            <p14:sldId id="261"/>
+            <p14:sldId id="296"/>
+            <p14:sldId id="305"/>
           </p14:sldIdLst>
         </p14:section>
         <p14:section name="ฝ่ายขาย · จัดซื้อ" id="{0428B52A-E1C2-2317-831F-B281F4B4CF24}">
           <p14:sldIdLst>
-            <p14:sldId id="262"/>
             <p14:sldId id="263"/>
             <p14:sldId id="264"/>
-            <p14:sldId id="265"/>
+            <p14:sldId id="306"/>
             <p14:sldId id="266"/>
             <p14:sldId id="267"/>
+            <p14:sldId id="307"/>
           </p14:sldIdLst>
         </p14:section>
         <p14:section name="ทีมคลัง" id="{17B57934-42B8-3F0A-C2BA-3CD2BB37A95C}">
           <p14:sldIdLst>
-            <p14:sldId id="268"/>
             <p14:sldId id="269"/>
             <p14:sldId id="288"/>
             <p14:sldId id="271"/>
@@ -165,23 +165,23 @@
             <p14:sldId id="292"/>
             <p14:sldId id="289"/>
             <p14:sldId id="275"/>
+            <p14:sldId id="308"/>
           </p14:sldIdLst>
         </p14:section>
         <p14:section name="ผู้จัดการ · ผู้บริหาร · Admin" id="{8F9C04DD-F2A8-86D5-E070-B442F62AE57F}">
           <p14:sldIdLst>
-            <p14:sldId id="276"/>
             <p14:sldId id="277"/>
             <p14:sldId id="290"/>
             <p14:sldId id="279"/>
+            <p14:sldId id="309"/>
           </p14:sldIdLst>
         </p14:section>
         <p14:section name="LINE และฝึกปฏิบัติ" id="{E1EE0DEC-B947-EEFC-85EF-C74033F9757C}">
           <p14:sldIdLst>
-            <p14:sldId id="280"/>
             <p14:sldId id="281"/>
             <p14:sldId id="291"/>
             <p14:sldId id="283"/>
-            <p14:sldId id="284"/>
+            <p14:sldId id="310"/>
           </p14:sldIdLst>
         </p14:section>
       </p14:sectionLst>
@@ -363,9 +363,22 @@
           <a:lstStyle/>
           <a:p>
             <a:r>
+              <a:rPr lang="th-TH" dirty="0"/>
+              <a:t>เป้าหมายสำหรับวันนี้แนะนำการใช้งาน และให้เข้าใจ </a:t>
+            </a:r>
+            <a:r>
+              <a:rPr lang="th-TH" dirty="0" err="1"/>
+              <a:t>f</a:t>
+            </a:r>
+            <a:r>
               <a:rPr lang="en-US" dirty="0"/>
-              <a:t>ทักทาย แนะนำทีมวิทยากร เป้าหมาย: จบการอบรม ทุกคนทำงานในบทบาทของตัวเองบนระบบได้จริง ภาพบนสไลด์เป็นหน้าจอจริงจากข้อมูลตัวอย่าง ไม่ใช่ข้อมูลลูกค้าจริง ขอให้ทุกคนมีบัญชีและล็อกอินได้ก่อนช่วงฝึกปฏิบัติ</a:t>
-            </a:r>
+              <a:t>low </a:t>
+            </a:r>
+            <a:r>
+              <a:rPr lang="th-TH" dirty="0"/>
+              <a:t>การทำงานเบื้องต้นก่อนนะครับ </a:t>
+            </a:r>
+            <a:endParaRPr lang="en-US" dirty="0"/>
           </a:p>
         </p:txBody>
       </p:sp>
@@ -2451,9 +2464,10 @@
           <a:lstStyle/>
           <a:p>
             <a:r>
-              <a:rPr lang="en-US" dirty="0"/>
-              <a:t>อ่านเรียงจากซ้ายบนไปขวาล่าง คือลำดับปกติของคิว เลยเวลานัดไม่ได้แปลว่าคิวหาย รถมาถึงแล้วยังกดรถมาถึงแล้วได้ ถ้าเลยเวลาเผื่อสองเท่า ระบบปรับเป็นไม่มาอัตโนมัติ (ตั้งเปิดปิดได้) การยกเลิกจากพอร์ทัลต้องใส่เหตุผลเสมอ ลูกค้าเห็นเหตุผลนั้น</a:t>
-            </a:r>
+              <a:rPr lang="th-TH" dirty="0"/>
+              <a:t>สถานะ คิว </a:t>
+            </a:r>
+            <a:endParaRPr lang="en-US" dirty="0"/>
           </a:p>
         </p:txBody>
       </p:sp>
@@ -2538,9 +2552,18 @@
           <a:lstStyle/>
           <a:p>
             <a:r>
+              <a:rPr lang="th-TH" dirty="0"/>
+              <a:t>ตัวอย่าง เมล ที่ ผู้ใช้งานจะเห็นครั้งแรกหลังจาก </a:t>
+            </a:r>
+            <a:r>
               <a:rPr lang="en-US" dirty="0"/>
-              <a:t>บางองค์กรใช้รหัสผ่านเริ่มต้นร่วมแทนอีเมลเชิญ ถ้าใช้แบบนั้น ระบบจะชวนเปลี่ยนรหัสทุกครั้งที่ล็อกอินจนกว่าจะเปลี่ยน ขอให้ทุกคนเปลี่ยนวันนี้ แนะนำ Chrome หรือ Edge ใช้บัญชีของตัวเองเท่านั้น เพราะทุกการแก้ไขถูกบันทึกชื่อผู้ทำ</a:t>
-            </a:r>
+              <a:t>admin </a:t>
+            </a:r>
+            <a:r>
+              <a:rPr lang="th-TH" dirty="0"/>
+              <a:t>เชิญเช้าใช้ระบบ </a:t>
+            </a:r>
+            <a:endParaRPr lang="en-US" dirty="0"/>
           </a:p>
         </p:txBody>
       </p:sp>
@@ -2893,11 +2916,202 @@
           <a:chExt cx="0" cy="0"/>
         </a:xfrm>
       </p:grpSpPr>
+      <p:grpSp>
+        <p:nvGrpSpPr>
+          <p:cNvPr id="2" name="Footer"/>
+          <p:cNvGrpSpPr/>
+          <p:nvPr userDrawn="1"/>
+        </p:nvGrpSpPr>
+        <p:grpSpPr>
+          <a:xfrm>
+            <a:off x="731519" y="6254495"/>
+            <a:ext cx="10728930" cy="416053"/>
+            <a:chOff x="731519" y="6254495"/>
+            <a:chExt cx="10728930" cy="416053"/>
+          </a:xfrm>
+        </p:grpSpPr>
+        <p:sp>
+          <p:nvSpPr>
+            <p:cNvPr id="3" name="Footer Rule"/>
+            <p:cNvSpPr/>
+            <p:nvPr userDrawn="1"/>
+          </p:nvSpPr>
+          <p:spPr>
+            <a:xfrm>
+              <a:off x="731520" y="6254496"/>
+              <a:ext cx="10728929" cy="20116"/>
+            </a:xfrm>
+            <a:prstGeom prst="rect">
+              <a:avLst/>
+            </a:prstGeom>
+            <a:solidFill>
+              <a:srgbClr val="DDE5DF"/>
+            </a:solidFill>
+            <a:ln>
+              <a:noFill/>
+            </a:ln>
+          </p:spPr>
+          <p:txBody>
+            <a:bodyPr/>
+            <a:lstStyle/>
+            <a:p>
+              <a:endParaRPr lang="en-TH"/>
+            </a:p>
+          </p:txBody>
+        </p:sp>
+        <p:sp>
+          <p:nvSpPr>
+            <p:cNvPr id="4" name="Footer Accent"/>
+            <p:cNvSpPr/>
+            <p:nvPr userDrawn="1"/>
+          </p:nvSpPr>
+          <p:spPr>
+            <a:xfrm>
+              <a:off x="731519" y="6254495"/>
+              <a:ext cx="1375955" cy="45719"/>
+            </a:xfrm>
+            <a:prstGeom prst="rect">
+              <a:avLst/>
+            </a:prstGeom>
+            <a:solidFill>
+              <a:srgbClr val="1B5E3F"/>
+            </a:solidFill>
+            <a:ln>
+              <a:noFill/>
+            </a:ln>
+          </p:spPr>
+          <p:txBody>
+            <a:bodyPr/>
+            <a:lstStyle/>
+            <a:p>
+              <a:endParaRPr lang="en-TH"/>
+            </a:p>
+          </p:txBody>
+        </p:sp>
+        <p:pic>
+          <p:nvPicPr>
+            <p:cNvPr id="5" name="Footer Logo" descr="Go Along logo"/>
+            <p:cNvPicPr>
+              <a:picLocks noChangeAspect="1"/>
+            </p:cNvPicPr>
+            <p:nvPr userDrawn="1"/>
+          </p:nvPicPr>
+          <p:blipFill>
+            <a:blip r:embed="rId3"/>
+            <a:stretch>
+              <a:fillRect/>
+            </a:stretch>
+          </p:blipFill>
+          <p:spPr>
+            <a:xfrm>
+              <a:off x="731520" y="6454610"/>
+              <a:ext cx="237744" cy="166699"/>
+            </a:xfrm>
+            <a:prstGeom prst="rect">
+              <a:avLst/>
+            </a:prstGeom>
+          </p:spPr>
+        </p:pic>
+        <p:sp>
+          <p:nvSpPr>
+            <p:cNvPr id="6" name="Footer Company"/>
+            <p:cNvSpPr txBox="1"/>
+            <p:nvPr userDrawn="1"/>
+          </p:nvSpPr>
+          <p:spPr>
+            <a:xfrm>
+              <a:off x="1060704" y="6451092"/>
+              <a:ext cx="3657600" cy="219456"/>
+            </a:xfrm>
+            <a:prstGeom prst="rect">
+              <a:avLst/>
+            </a:prstGeom>
+            <a:noFill/>
+          </p:spPr>
+          <p:txBody>
+            <a:bodyPr wrap="square" lIns="0" tIns="0" rIns="0" bIns="0" anchor="t"/>
+            <a:lstStyle/>
+            <a:p>
+              <a:pPr algn="l">
+                <a:spcBef>
+                  <a:spcPts val="0"/>
+                </a:spcBef>
+                <a:spcAft>
+                  <a:spcPts val="0"/>
+                </a:spcAft>
+                <a:buNone/>
+              </a:pPr>
+              <a:r>
+                <a:rPr lang="en-US" sz="950" b="1" spc="40" dirty="0">
+                  <a:solidFill>
+                    <a:srgbClr val="1B5E3F"/>
+                  </a:solidFill>
+                  <a:latin typeface="IBM Plex Sans Thai"/>
+                  <a:ea typeface="IBM Plex Sans Thai"/>
+                  <a:cs typeface="IBM Plex Sans Thai"/>
+                </a:rPr>
+                <a:t>Go Along Co., Ltd.</a:t>
+              </a:r>
+            </a:p>
+          </p:txBody>
+        </p:sp>
+      </p:grpSp>
+      <p:sp>
+        <p:nvSpPr>
+          <p:cNvPr id="7" name="Footer Page Number"/>
+          <p:cNvSpPr txBox="1"/>
+          <p:nvPr userDrawn="1"/>
+        </p:nvSpPr>
+        <p:spPr>
+          <a:xfrm>
+            <a:off x="9997409" y="6451092"/>
+            <a:ext cx="1463040" cy="219456"/>
+          </a:xfrm>
+          <a:prstGeom prst="rect">
+            <a:avLst/>
+          </a:prstGeom>
+          <a:noFill/>
+        </p:spPr>
+        <p:txBody>
+          <a:bodyPr wrap="square" lIns="0" tIns="0" rIns="0" bIns="0" anchor="t"/>
+          <a:lstStyle/>
+          <a:p>
+            <a:pPr algn="r">
+              <a:spcBef>
+                <a:spcPts val="0"/>
+              </a:spcBef>
+              <a:spcAft>
+                <a:spcPts val="0"/>
+              </a:spcAft>
+              <a:buNone/>
+            </a:pPr>
+            <a:fld id="{6F1C2A3B-9D4E-4B8A-A1C2-3E5F7A9B0C11}" type="slidenum">
+              <a:rPr lang="en-US" sz="950" b="1" spc="40" dirty="0">
+                <a:solidFill>
+                  <a:srgbClr val="8A9490"/>
+                </a:solidFill>
+                <a:latin typeface="IBM Plex Sans Thai"/>
+                <a:ea typeface="IBM Plex Sans Thai"/>
+                <a:cs typeface="IBM Plex Sans Thai"/>
+              </a:rPr>
+              <a:t>‹#›</a:t>
+            </a:fld>
+            <a:endParaRPr lang="en-US" sz="950" b="1" spc="40" dirty="0">
+              <a:solidFill>
+                <a:srgbClr val="8A9490"/>
+              </a:solidFill>
+              <a:latin typeface="IBM Plex Sans Thai"/>
+              <a:ea typeface="IBM Plex Sans Thai"/>
+              <a:cs typeface="IBM Plex Sans Thai"/>
+            </a:endParaRPr>
+          </a:p>
+        </p:txBody>
+      </p:sp>
     </p:spTree>
   </p:cSld>
   <p:clrMap bg1="lt1" tx1="dk1" bg2="lt2" tx2="dk2" accent1="accent1" accent2="accent2" accent3="accent3" accent4="accent4" accent5="accent5" accent6="accent6" hlink="hlink" folHlink="folHlink"/>
   <p:sldLayoutIdLst>
-    <p:sldLayoutId id="2147483651" r:id="rId1"/>
+    <p:sldLayoutId id="2147483656" r:id="rId1"/>
   </p:sldLayoutIdLst>
   <p:hf sldNum="0" hdr="0" ftr="0" dt="0"/>
   <p:txStyles>
@@ -3154,7 +3368,7 @@
 </file>
 
 <file path=ppt/slides/slide1.xml><?xml version="1.0" encoding="utf-8"?>
-<p:sld xmlns:a="http://schemas.openxmlformats.org/drawingml/2006/main" xmlns:r="http://schemas.openxmlformats.org/officeDocument/2006/relationships" xmlns:p="http://schemas.openxmlformats.org/presentationml/2006/main">
+<p:sld xmlns:a="http://schemas.openxmlformats.org/drawingml/2006/main" xmlns:r="http://schemas.openxmlformats.org/officeDocument/2006/relationships" xmlns:p="http://schemas.openxmlformats.org/presentationml/2006/main" showMasterSp="0">
   <p:cSld name="Slide 1">
     <p:bg>
       <p:bgPr>
@@ -3294,7 +3508,7 @@
                 <a:latin typeface="IBM Plex Sans Thai" panose="020B0503050203000203" pitchFamily="34" charset="-34"/>
                 <a:cs typeface="IBM Plex Sans Thai" panose="020B0503050203000203" pitchFamily="34" charset="-34"/>
               </a:rPr>
-              <a:t>Dock Queue</a:t>
+              <a:t>Queue</a:t>
             </a:r>
             <a:endParaRPr lang="en-US" sz="5200" dirty="0">
               <a:latin typeface="IBM Plex Sans Thai" panose="020B0503050203000203" pitchFamily="34" charset="-34"/>
@@ -3347,7 +3561,7 @@
         </p:nvSpPr>
         <p:spPr>
           <a:xfrm>
-            <a:off x="685800" y="5852160"/>
+            <a:off x="685800" y="5588000"/>
             <a:ext cx="6400800" cy="365760"/>
           </a:xfrm>
           <a:prstGeom prst="rect">
@@ -3364,12 +3578,20 @@
               <a:buNone/>
             </a:pPr>
             <a:r>
+              <a:rPr lang="en-US" sz="1200" dirty="0" err="1">
+                <a:solidFill>
+                  <a:srgbClr val="9CC4AE"/>
+                </a:solidFill>
+              </a:rPr>
+              <a:t>จัดทำโดย</a:t>
+            </a:r>
+            <a:r>
               <a:rPr lang="en-US" sz="1200" dirty="0">
                 <a:solidFill>
                   <a:srgbClr val="9CC4AE"/>
                 </a:solidFill>
               </a:rPr>
-              <a:t>บริษัท เฟมไลน์ โปรดักส์ จำกัด · จัดทำโดย บริษัท โกอะลอง จำกัด</a:t>
+              <a:t> บริษัท โกอะลอง จำกัด</a:t>
             </a:r>
             <a:endParaRPr lang="en-US" sz="1200" dirty="0"/>
           </a:p>
@@ -3391,8 +3613,208 @@
         </p:blipFill>
         <p:spPr>
           <a:xfrm>
-            <a:off x="6400800" y="1554480"/>
-            <a:ext cx="5120640" cy="2880360"/>
+            <a:off x="4625009" y="1153584"/>
+            <a:ext cx="6764937" cy="3805277"/>
+          </a:xfrm>
+          <a:prstGeom prst="rect">
+            <a:avLst/>
+          </a:prstGeom>
+        </p:spPr>
+      </p:pic>
+      <p:sp>
+        <p:nvSpPr>
+          <p:cNvPr id="9" name="Footer Rule"/>
+          <p:cNvSpPr/>
+          <p:nvPr/>
+        </p:nvSpPr>
+        <p:spPr>
+          <a:xfrm>
+            <a:off x="731520" y="6254496"/>
+            <a:ext cx="10728929" cy="20116"/>
+          </a:xfrm>
+          <a:prstGeom prst="rect">
+            <a:avLst/>
+          </a:prstGeom>
+          <a:solidFill>
+            <a:srgbClr val="2F5A47"/>
+          </a:solidFill>
+          <a:ln>
+            <a:noFill/>
+          </a:ln>
+        </p:spPr>
+        <p:txBody>
+          <a:bodyPr/>
+          <a:lstStyle/>
+          <a:p>
+            <a:endParaRPr lang="en-TH"/>
+          </a:p>
+        </p:txBody>
+      </p:sp>
+      <p:sp>
+        <p:nvSpPr>
+          <p:cNvPr id="10" name="Footer Accent"/>
+          <p:cNvSpPr/>
+          <p:nvPr/>
+        </p:nvSpPr>
+        <p:spPr>
+          <a:xfrm>
+            <a:off x="731519" y="6254495"/>
+            <a:ext cx="1375955" cy="45719"/>
+          </a:xfrm>
+          <a:prstGeom prst="rect">
+            <a:avLst/>
+          </a:prstGeom>
+          <a:solidFill>
+            <a:srgbClr val="ADC32B"/>
+          </a:solidFill>
+          <a:ln>
+            <a:noFill/>
+          </a:ln>
+        </p:spPr>
+        <p:txBody>
+          <a:bodyPr/>
+          <a:lstStyle/>
+          <a:p>
+            <a:endParaRPr lang="en-TH"/>
+          </a:p>
+        </p:txBody>
+      </p:sp>
+      <p:sp>
+        <p:nvSpPr>
+          <p:cNvPr id="12" name="Footer Company"/>
+          <p:cNvSpPr txBox="1"/>
+          <p:nvPr/>
+        </p:nvSpPr>
+        <p:spPr>
+          <a:xfrm>
+            <a:off x="1060704" y="6451092"/>
+            <a:ext cx="3657600" cy="219456"/>
+          </a:xfrm>
+          <a:prstGeom prst="rect">
+            <a:avLst/>
+          </a:prstGeom>
+          <a:noFill/>
+        </p:spPr>
+        <p:txBody>
+          <a:bodyPr wrap="square" lIns="0" tIns="0" rIns="0" bIns="0" anchor="t"/>
+          <a:lstStyle/>
+          <a:p>
+            <a:pPr algn="l">
+              <a:buNone/>
+            </a:pPr>
+            <a:r>
+              <a:rPr lang="en-US" sz="950" b="1" spc="40" dirty="0">
+                <a:solidFill>
+                  <a:srgbClr val="AEDBC0"/>
+                </a:solidFill>
+                <a:latin typeface="IBM Plex Sans Thai"/>
+                <a:ea typeface="IBM Plex Sans Thai"/>
+                <a:cs typeface="IBM Plex Sans Thai"/>
+              </a:rPr>
+              <a:t>Go Along Co., Ltd.</a:t>
+            </a:r>
+          </a:p>
+        </p:txBody>
+      </p:sp>
+      <p:sp>
+        <p:nvSpPr>
+          <p:cNvPr id="13" name="Footer Page Number"/>
+          <p:cNvSpPr txBox="1"/>
+          <p:nvPr/>
+        </p:nvSpPr>
+        <p:spPr>
+          <a:xfrm>
+            <a:off x="9997409" y="6451092"/>
+            <a:ext cx="1463040" cy="219456"/>
+          </a:xfrm>
+          <a:prstGeom prst="rect">
+            <a:avLst/>
+          </a:prstGeom>
+          <a:noFill/>
+        </p:spPr>
+        <p:txBody>
+          <a:bodyPr wrap="square" lIns="0" tIns="0" rIns="0" bIns="0" anchor="t"/>
+          <a:lstStyle/>
+          <a:p>
+            <a:pPr algn="r">
+              <a:buNone/>
+            </a:pPr>
+            <a:fld id="{6F1C2A3B-9D4E-4B8A-A1C2-3E5F7A9B0C11}" type="slidenum">
+              <a:rPr lang="en-US" sz="950" b="1" spc="40" dirty="0">
+                <a:solidFill>
+                  <a:srgbClr val="8FA89B"/>
+                </a:solidFill>
+                <a:latin typeface="IBM Plex Sans Thai"/>
+                <a:ea typeface="IBM Plex Sans Thai"/>
+                <a:cs typeface="IBM Plex Sans Thai"/>
+              </a:rPr>
+              <a:t>1</a:t>
+            </a:fld>
+            <a:endParaRPr lang="en-US" sz="950" b="1" spc="40" dirty="0">
+              <a:solidFill>
+                <a:srgbClr val="8FA89B"/>
+              </a:solidFill>
+              <a:latin typeface="IBM Plex Sans Thai"/>
+              <a:ea typeface="IBM Plex Sans Thai"/>
+              <a:cs typeface="IBM Plex Sans Thai"/>
+            </a:endParaRPr>
+          </a:p>
+        </p:txBody>
+      </p:sp>
+      <p:pic>
+        <p:nvPicPr>
+          <p:cNvPr id="6" name="Picture 5" descr="logo_goalong.png">
+            <a:extLst>
+              <a:ext uri="{FF2B5EF4-FFF2-40B4-BE49-F238E27FC236}">
+                <a16:creationId xmlns:a16="http://schemas.microsoft.com/office/drawing/2014/main" id="{2DEA5F1B-9994-DFF5-AE5D-619590137917}"/>
+              </a:ext>
+            </a:extLst>
+          </p:cNvPr>
+          <p:cNvPicPr>
+            <a:picLocks noChangeAspect="1"/>
+          </p:cNvPicPr>
+          <p:nvPr/>
+        </p:nvPicPr>
+        <p:blipFill>
+          <a:blip r:embed="rId4"/>
+          <a:stretch>
+            <a:fillRect/>
+          </a:stretch>
+        </p:blipFill>
+        <p:spPr>
+          <a:xfrm>
+            <a:off x="731520" y="6454648"/>
+            <a:ext cx="237744" cy="166699"/>
+          </a:xfrm>
+          <a:prstGeom prst="rect">
+            <a:avLst/>
+          </a:prstGeom>
+        </p:spPr>
+      </p:pic>
+      <p:pic>
+        <p:nvPicPr>
+          <p:cNvPr id="15" name="Picture 14" descr="A qr code with green squares&#10;&#10;AI-generated content may be incorrect.">
+            <a:extLst>
+              <a:ext uri="{FF2B5EF4-FFF2-40B4-BE49-F238E27FC236}">
+                <a16:creationId xmlns:a16="http://schemas.microsoft.com/office/drawing/2014/main" id="{30623625-FF9A-95C9-05C3-BC6050DC8EA5}"/>
+              </a:ext>
+            </a:extLst>
+          </p:cNvPr>
+          <p:cNvPicPr>
+            <a:picLocks noChangeAspect="1"/>
+          </p:cNvPicPr>
+          <p:nvPr/>
+        </p:nvPicPr>
+        <p:blipFill>
+          <a:blip r:embed="rId5"/>
+          <a:stretch>
+            <a:fillRect/>
+          </a:stretch>
+        </p:blipFill>
+        <p:spPr>
+          <a:xfrm>
+            <a:off x="5969977" y="5380482"/>
+            <a:ext cx="780796" cy="780796"/>
           </a:xfrm>
           <a:prstGeom prst="rect">
             <a:avLst/>
@@ -3402,7 +3824,7 @@
     </p:spTree>
     <p:extLst>
       <p:ext uri="{BB962C8B-B14F-4D97-AF65-F5344CB8AC3E}">
-        <p14:creationId xmlns:p14="http://schemas.microsoft.com/office/powerpoint/2010/main" val="3729710297"/>
+        <p14:creationId xmlns:p14="http://schemas.microsoft.com/office/powerpoint/2010/main" val="933841239"/>
       </p:ext>
     </p:extLst>
   </p:cSld>
@@ -3413,7 +3835,7 @@
 </file>
 
 <file path=ppt/slides/slide10.xml><?xml version="1.0" encoding="utf-8"?>
-<p:sld xmlns:a="http://schemas.openxmlformats.org/drawingml/2006/main" xmlns:r="http://schemas.openxmlformats.org/officeDocument/2006/relationships" xmlns:p="http://schemas.openxmlformats.org/presentationml/2006/main">
+<p:sld xmlns:a="http://schemas.openxmlformats.org/drawingml/2006/main" xmlns:r="http://schemas.openxmlformats.org/officeDocument/2006/relationships" xmlns:p="http://schemas.openxmlformats.org/presentationml/2006/main" showMasterSp="0">
   <p:cSld name="Slide 10">
     <p:bg>
       <p:bgPr>
@@ -3826,7 +4248,182 @@
           </a:p>
         </p:txBody>
       </p:sp>
+      <p:sp>
+        <p:nvSpPr>
+          <p:cNvPr id="13" name="Footer Rule"/>
+          <p:cNvSpPr/>
+          <p:nvPr/>
+        </p:nvSpPr>
+        <p:spPr>
+          <a:xfrm>
+            <a:off x="731520" y="6254496"/>
+            <a:ext cx="10728929" cy="20116"/>
+          </a:xfrm>
+          <a:prstGeom prst="rect">
+            <a:avLst/>
+          </a:prstGeom>
+          <a:solidFill>
+            <a:srgbClr val="DDE5DF"/>
+          </a:solidFill>
+          <a:ln>
+            <a:noFill/>
+          </a:ln>
+        </p:spPr>
+        <p:txBody>
+          <a:bodyPr/>
+          <a:lstStyle/>
+          <a:p>
+            <a:endParaRPr lang="en-TH"/>
+          </a:p>
+        </p:txBody>
+      </p:sp>
+      <p:sp>
+        <p:nvSpPr>
+          <p:cNvPr id="14" name="Footer Accent"/>
+          <p:cNvSpPr/>
+          <p:nvPr/>
+        </p:nvSpPr>
+        <p:spPr>
+          <a:xfrm>
+            <a:off x="731519" y="6254495"/>
+            <a:ext cx="1375955" cy="45719"/>
+          </a:xfrm>
+          <a:prstGeom prst="rect">
+            <a:avLst/>
+          </a:prstGeom>
+          <a:solidFill>
+            <a:srgbClr val="1B5E3F"/>
+          </a:solidFill>
+          <a:ln>
+            <a:noFill/>
+          </a:ln>
+        </p:spPr>
+        <p:txBody>
+          <a:bodyPr/>
+          <a:lstStyle/>
+          <a:p>
+            <a:endParaRPr lang="en-TH"/>
+          </a:p>
+        </p:txBody>
+      </p:sp>
+      <p:sp>
+        <p:nvSpPr>
+          <p:cNvPr id="16" name="Footer Company"/>
+          <p:cNvSpPr txBox="1"/>
+          <p:nvPr/>
+        </p:nvSpPr>
+        <p:spPr>
+          <a:xfrm>
+            <a:off x="1060704" y="6451092"/>
+            <a:ext cx="3657600" cy="219456"/>
+          </a:xfrm>
+          <a:prstGeom prst="rect">
+            <a:avLst/>
+          </a:prstGeom>
+          <a:noFill/>
+        </p:spPr>
+        <p:txBody>
+          <a:bodyPr wrap="square" lIns="0" tIns="0" rIns="0" bIns="0" anchor="t"/>
+          <a:lstStyle/>
+          <a:p>
+            <a:pPr algn="l">
+              <a:buNone/>
+            </a:pPr>
+            <a:r>
+              <a:rPr lang="en-US" sz="950" b="1" spc="40" dirty="0">
+                <a:solidFill>
+                  <a:srgbClr val="1B5E3F"/>
+                </a:solidFill>
+                <a:latin typeface="IBM Plex Sans Thai"/>
+                <a:ea typeface="IBM Plex Sans Thai"/>
+                <a:cs typeface="IBM Plex Sans Thai"/>
+              </a:rPr>
+              <a:t>Go Along Co., Ltd.</a:t>
+            </a:r>
+          </a:p>
+        </p:txBody>
+      </p:sp>
+      <p:sp>
+        <p:nvSpPr>
+          <p:cNvPr id="17" name="Footer Page Number"/>
+          <p:cNvSpPr txBox="1"/>
+          <p:nvPr/>
+        </p:nvSpPr>
+        <p:spPr>
+          <a:xfrm>
+            <a:off x="9997409" y="6451092"/>
+            <a:ext cx="1463040" cy="219456"/>
+          </a:xfrm>
+          <a:prstGeom prst="rect">
+            <a:avLst/>
+          </a:prstGeom>
+          <a:noFill/>
+        </p:spPr>
+        <p:txBody>
+          <a:bodyPr wrap="square" lIns="0" tIns="0" rIns="0" bIns="0" anchor="t"/>
+          <a:lstStyle/>
+          <a:p>
+            <a:pPr algn="r">
+              <a:buNone/>
+            </a:pPr>
+            <a:fld id="{6F1C2A3B-9D4E-4B8A-A1C2-3E5F7A9B0C11}" type="slidenum">
+              <a:rPr lang="en-US" sz="950" b="1" spc="40" dirty="0">
+                <a:solidFill>
+                  <a:srgbClr val="1B5E3F"/>
+                </a:solidFill>
+                <a:latin typeface="IBM Plex Sans Thai"/>
+                <a:ea typeface="IBM Plex Sans Thai"/>
+                <a:cs typeface="IBM Plex Sans Thai"/>
+              </a:rPr>
+              <a:t>10</a:t>
+            </a:fld>
+            <a:endParaRPr lang="en-US" sz="950" b="1" spc="40" dirty="0">
+              <a:solidFill>
+                <a:srgbClr val="1B5E3F"/>
+              </a:solidFill>
+              <a:latin typeface="IBM Plex Sans Thai"/>
+              <a:ea typeface="IBM Plex Sans Thai"/>
+              <a:cs typeface="IBM Plex Sans Thai"/>
+            </a:endParaRPr>
+          </a:p>
+        </p:txBody>
+      </p:sp>
+      <p:pic>
+        <p:nvPicPr>
+          <p:cNvPr id="18" name="Copied Picture 18" descr="logo_goalong.png">
+            <a:extLst>
+              <a:ext uri="{FF2B5EF4-FFF2-40B4-BE49-F238E27FC236}">
+                <a16:creationId xmlns:a16="http://schemas.microsoft.com/office/drawing/2014/main" id="{2DEA5F1B-9994-DFF5-AE5D-619590137917}"/>
+              </a:ext>
+            </a:extLst>
+          </p:cNvPr>
+          <p:cNvPicPr>
+            <a:picLocks noChangeAspect="1"/>
+          </p:cNvPicPr>
+          <p:nvPr/>
+        </p:nvPicPr>
+        <p:blipFill>
+          <a:blip r:embed="rId3"/>
+          <a:stretch>
+            <a:fillRect/>
+          </a:stretch>
+        </p:blipFill>
+        <p:spPr>
+          <a:xfrm>
+            <a:off x="731520" y="6454648"/>
+            <a:ext cx="237744" cy="166699"/>
+          </a:xfrm>
+          <a:prstGeom prst="rect">
+            <a:avLst/>
+          </a:prstGeom>
+        </p:spPr>
+      </p:pic>
     </p:spTree>
+    <p:extLst>
+      <p:ext uri="{BB962C8B-B14F-4D97-AF65-F5344CB8AC3E}">
+        <p14:creationId xmlns:p14="http://schemas.microsoft.com/office/powerpoint/2010/main" val="2308853603"/>
+      </p:ext>
+    </p:extLst>
   </p:cSld>
   <p:clrMapOvr>
     <a:masterClrMapping/>
@@ -3868,7 +4465,7 @@
         <p:spPr>
           <a:xfrm>
             <a:off x="685800" y="457200"/>
-            <a:ext cx="4389120" cy="5943600"/>
+            <a:ext cx="4145279" cy="5613400"/>
           </a:xfrm>
           <a:prstGeom prst="roundRect">
             <a:avLst>
@@ -3916,8 +4513,8 @@
         </p:blipFill>
         <p:spPr>
           <a:xfrm>
-            <a:off x="758952" y="648235"/>
-            <a:ext cx="4242816" cy="5561529"/>
+            <a:off x="754888" y="637621"/>
+            <a:ext cx="4007104" cy="5252555"/>
           </a:xfrm>
           <a:prstGeom prst="rect">
             <a:avLst/>
@@ -4237,7 +4834,7 @@
         <p:spPr>
           <a:xfrm>
             <a:off x="685800" y="457200"/>
-            <a:ext cx="2788920" cy="5943600"/>
+            <a:ext cx="2633979" cy="5613400"/>
           </a:xfrm>
           <a:prstGeom prst="roundRect">
             <a:avLst>
@@ -4285,8 +4882,8 @@
         </p:blipFill>
         <p:spPr>
           <a:xfrm>
-            <a:off x="758952" y="569554"/>
-            <a:ext cx="2642616" cy="5718892"/>
+            <a:off x="754888" y="563312"/>
+            <a:ext cx="2495804" cy="5401175"/>
           </a:xfrm>
           <a:prstGeom prst="rect">
             <a:avLst/>
@@ -4302,7 +4899,7 @@
         <p:spPr>
           <a:xfrm>
             <a:off x="3703320" y="457200"/>
-            <a:ext cx="2788920" cy="5943600"/>
+            <a:ext cx="2633979" cy="5613400"/>
           </a:xfrm>
           <a:prstGeom prst="roundRect">
             <a:avLst>
@@ -4350,8 +4947,8 @@
         </p:blipFill>
         <p:spPr>
           <a:xfrm>
-            <a:off x="3776472" y="569554"/>
-            <a:ext cx="2642616" cy="5718892"/>
+            <a:off x="3772408" y="563312"/>
+            <a:ext cx="2495804" cy="5401175"/>
           </a:xfrm>
           <a:prstGeom prst="rect">
             <a:avLst/>
@@ -4565,7 +5162,7 @@
 </file>
 
 <file path=ppt/slides/slide13.xml><?xml version="1.0" encoding="utf-8"?>
-<p:sld xmlns:a="http://schemas.openxmlformats.org/drawingml/2006/main" xmlns:r="http://schemas.openxmlformats.org/officeDocument/2006/relationships" xmlns:p="http://schemas.openxmlformats.org/presentationml/2006/main">
+<p:sld xmlns:a="http://schemas.openxmlformats.org/drawingml/2006/main" xmlns:r="http://schemas.openxmlformats.org/officeDocument/2006/relationships" xmlns:p="http://schemas.openxmlformats.org/presentationml/2006/main" showMasterSp="0">
   <p:cSld name="Slide 13">
     <p:bg>
       <p:bgPr>
@@ -4697,7 +5294,182 @@
           </a:p>
         </p:txBody>
       </p:sp>
+      <p:sp>
+        <p:nvSpPr>
+          <p:cNvPr id="5" name="Footer Rule"/>
+          <p:cNvSpPr/>
+          <p:nvPr/>
+        </p:nvSpPr>
+        <p:spPr>
+          <a:xfrm>
+            <a:off x="731520" y="6254496"/>
+            <a:ext cx="10728929" cy="20116"/>
+          </a:xfrm>
+          <a:prstGeom prst="rect">
+            <a:avLst/>
+          </a:prstGeom>
+          <a:solidFill>
+            <a:srgbClr val="2F5A47"/>
+          </a:solidFill>
+          <a:ln>
+            <a:noFill/>
+          </a:ln>
+        </p:spPr>
+        <p:txBody>
+          <a:bodyPr/>
+          <a:lstStyle/>
+          <a:p>
+            <a:endParaRPr lang="en-TH"/>
+          </a:p>
+        </p:txBody>
+      </p:sp>
+      <p:sp>
+        <p:nvSpPr>
+          <p:cNvPr id="6" name="Footer Accent"/>
+          <p:cNvSpPr/>
+          <p:nvPr/>
+        </p:nvSpPr>
+        <p:spPr>
+          <a:xfrm>
+            <a:off x="731519" y="6254495"/>
+            <a:ext cx="1375955" cy="45719"/>
+          </a:xfrm>
+          <a:prstGeom prst="rect">
+            <a:avLst/>
+          </a:prstGeom>
+          <a:solidFill>
+            <a:srgbClr val="ADC32B"/>
+          </a:solidFill>
+          <a:ln>
+            <a:noFill/>
+          </a:ln>
+        </p:spPr>
+        <p:txBody>
+          <a:bodyPr/>
+          <a:lstStyle/>
+          <a:p>
+            <a:endParaRPr lang="en-TH"/>
+          </a:p>
+        </p:txBody>
+      </p:sp>
+      <p:sp>
+        <p:nvSpPr>
+          <p:cNvPr id="8" name="Footer Company"/>
+          <p:cNvSpPr txBox="1"/>
+          <p:nvPr/>
+        </p:nvSpPr>
+        <p:spPr>
+          <a:xfrm>
+            <a:off x="1060704" y="6451092"/>
+            <a:ext cx="3657600" cy="219456"/>
+          </a:xfrm>
+          <a:prstGeom prst="rect">
+            <a:avLst/>
+          </a:prstGeom>
+          <a:noFill/>
+        </p:spPr>
+        <p:txBody>
+          <a:bodyPr wrap="square" lIns="0" tIns="0" rIns="0" bIns="0" anchor="t"/>
+          <a:lstStyle/>
+          <a:p>
+            <a:pPr algn="l">
+              <a:buNone/>
+            </a:pPr>
+            <a:r>
+              <a:rPr lang="en-US" sz="950" b="1" spc="40" dirty="0">
+                <a:solidFill>
+                  <a:srgbClr val="AEDBC0"/>
+                </a:solidFill>
+                <a:latin typeface="IBM Plex Sans Thai"/>
+                <a:ea typeface="IBM Plex Sans Thai"/>
+                <a:cs typeface="IBM Plex Sans Thai"/>
+              </a:rPr>
+              <a:t>Go Along Co., Ltd.</a:t>
+            </a:r>
+          </a:p>
+        </p:txBody>
+      </p:sp>
+      <p:sp>
+        <p:nvSpPr>
+          <p:cNvPr id="9" name="Footer Page Number"/>
+          <p:cNvSpPr txBox="1"/>
+          <p:nvPr/>
+        </p:nvSpPr>
+        <p:spPr>
+          <a:xfrm>
+            <a:off x="9997409" y="6451092"/>
+            <a:ext cx="1463040" cy="219456"/>
+          </a:xfrm>
+          <a:prstGeom prst="rect">
+            <a:avLst/>
+          </a:prstGeom>
+          <a:noFill/>
+        </p:spPr>
+        <p:txBody>
+          <a:bodyPr wrap="square" lIns="0" tIns="0" rIns="0" bIns="0" anchor="t"/>
+          <a:lstStyle/>
+          <a:p>
+            <a:pPr algn="r">
+              <a:buNone/>
+            </a:pPr>
+            <a:fld id="{6F1C2A3B-9D4E-4B8A-A1C2-3E5F7A9B0C11}" type="slidenum">
+              <a:rPr lang="en-US" sz="950" b="1" spc="40" dirty="0">
+                <a:solidFill>
+                  <a:srgbClr val="8FA89B"/>
+                </a:solidFill>
+                <a:latin typeface="IBM Plex Sans Thai"/>
+                <a:ea typeface="IBM Plex Sans Thai"/>
+                <a:cs typeface="IBM Plex Sans Thai"/>
+              </a:rPr>
+              <a:t>13</a:t>
+            </a:fld>
+            <a:endParaRPr lang="en-US" sz="950" b="1" spc="40" dirty="0">
+              <a:solidFill>
+                <a:srgbClr val="8FA89B"/>
+              </a:solidFill>
+              <a:latin typeface="IBM Plex Sans Thai"/>
+              <a:ea typeface="IBM Plex Sans Thai"/>
+              <a:cs typeface="IBM Plex Sans Thai"/>
+            </a:endParaRPr>
+          </a:p>
+        </p:txBody>
+      </p:sp>
+      <p:pic>
+        <p:nvPicPr>
+          <p:cNvPr id="10" name="Copied Picture 10" descr="logo_goalong.png">
+            <a:extLst>
+              <a:ext uri="{FF2B5EF4-FFF2-40B4-BE49-F238E27FC236}">
+                <a16:creationId xmlns:a16="http://schemas.microsoft.com/office/drawing/2014/main" id="{2DEA5F1B-9994-DFF5-AE5D-619590137917}"/>
+              </a:ext>
+            </a:extLst>
+          </p:cNvPr>
+          <p:cNvPicPr>
+            <a:picLocks noChangeAspect="1"/>
+          </p:cNvPicPr>
+          <p:nvPr/>
+        </p:nvPicPr>
+        <p:blipFill>
+          <a:blip r:embed="rId3"/>
+          <a:stretch>
+            <a:fillRect/>
+          </a:stretch>
+        </p:blipFill>
+        <p:spPr>
+          <a:xfrm>
+            <a:off x="731520" y="6454648"/>
+            <a:ext cx="237744" cy="166699"/>
+          </a:xfrm>
+          <a:prstGeom prst="rect">
+            <a:avLst/>
+          </a:prstGeom>
+        </p:spPr>
+      </p:pic>
     </p:spTree>
+    <p:extLst>
+      <p:ext uri="{BB962C8B-B14F-4D97-AF65-F5344CB8AC3E}">
+        <p14:creationId xmlns:p14="http://schemas.microsoft.com/office/powerpoint/2010/main" val="2453709008"/>
+      </p:ext>
+    </p:extLst>
   </p:cSld>
   <p:clrMapOvr>
     <a:masterClrMapping/>
@@ -4739,7 +5511,7 @@
         <p:spPr>
           <a:xfrm>
             <a:off x="685800" y="457200"/>
-            <a:ext cx="3429000" cy="5943600"/>
+            <a:ext cx="3238499" cy="5613400"/>
           </a:xfrm>
           <a:prstGeom prst="roundRect">
             <a:avLst>
@@ -4787,8 +5559,8 @@
         </p:blipFill>
         <p:spPr>
           <a:xfrm>
-            <a:off x="758952" y="530764"/>
-            <a:ext cx="3282696" cy="5796472"/>
+            <a:off x="754888" y="526677"/>
+            <a:ext cx="3100324" cy="5474445"/>
           </a:xfrm>
           <a:prstGeom prst="rect">
             <a:avLst/>
@@ -6619,7 +7391,7 @@
         <p:spPr>
           <a:xfrm>
             <a:off x="685800" y="457200"/>
-            <a:ext cx="4023360" cy="5943600"/>
+            <a:ext cx="3799839" cy="5613400"/>
           </a:xfrm>
           <a:prstGeom prst="roundRect">
             <a:avLst>
@@ -6667,8 +7439,8 @@
         </p:blipFill>
         <p:spPr>
           <a:xfrm>
-            <a:off x="758952" y="553517"/>
-            <a:ext cx="3877056" cy="5750966"/>
+            <a:off x="754888" y="548166"/>
+            <a:ext cx="3661664" cy="5431467"/>
           </a:xfrm>
           <a:prstGeom prst="rect">
             <a:avLst/>
@@ -7110,7 +7882,7 @@
         <p:spPr>
           <a:xfrm>
             <a:off x="685800" y="457200"/>
-            <a:ext cx="5486400" cy="5943600"/>
+            <a:ext cx="5181599" cy="5613400"/>
           </a:xfrm>
           <a:prstGeom prst="roundRect">
             <a:avLst>
@@ -7158,8 +7930,8 @@
         </p:blipFill>
         <p:spPr>
           <a:xfrm>
-            <a:off x="758952" y="652150"/>
-            <a:ext cx="5340096" cy="5553700"/>
+            <a:off x="754888" y="641319"/>
+            <a:ext cx="5043424" cy="5245161"/>
           </a:xfrm>
           <a:prstGeom prst="rect">
             <a:avLst/>
@@ -9339,7 +10111,7 @@
           <p:nvPr>
             <p:extLst>
               <p:ext uri="{D42A27DB-BD31-4B8C-83A1-F6EECF244321}">
-                <p14:modId xmlns:p14="http://schemas.microsoft.com/office/powerpoint/2010/main" val="1426754711"/>
+                <p14:modId xmlns:p14="http://schemas.microsoft.com/office/powerpoint/2010/main" val="4025420973"/>
               </p:ext>
             </p:extLst>
           </p:nvPr>
@@ -9883,7 +10655,7 @@
                           <a:ea typeface="IBM Plex Sans Thai" pitchFamily="34" charset="-122"/>
                           <a:cs typeface="IBM Plex Sans Thai" pitchFamily="34" charset="-120"/>
                         </a:rPr>
-                        <a:t>30 นาที</a:t>
+                        <a:t>10 นาที</a:t>
                       </a:r>
                       <a:endParaRPr lang="en-US" sz="1600" dirty="0">
                         <a:latin typeface="IBM Plex Sans Thai" charset="0"/>
@@ -10162,7 +10934,7 @@
                           <a:ea typeface="IBM Plex Sans Thai" pitchFamily="34" charset="-122"/>
                           <a:cs typeface="IBM Plex Sans Thai" pitchFamily="34" charset="-120"/>
                         </a:rPr>
-                        <a:t>30 นาที</a:t>
+                        <a:t>20 นาที</a:t>
                       </a:r>
                       <a:endParaRPr lang="en-US" sz="1600" dirty="0">
                         <a:latin typeface="IBM Plex Sans Thai" charset="0"/>
@@ -10441,7 +11213,7 @@
                           <a:ea typeface="IBM Plex Sans Thai" pitchFamily="34" charset="-122"/>
                           <a:cs typeface="IBM Plex Sans Thai" pitchFamily="34" charset="-120"/>
                         </a:rPr>
-                        <a:t>60 นาที</a:t>
+                        <a:t>30 นาที</a:t>
                       </a:r>
                       <a:endParaRPr lang="en-US" sz="1600" dirty="0">
                         <a:latin typeface="IBM Plex Sans Thai" charset="0"/>
@@ -10731,7 +11503,7 @@
                           <a:ea typeface="IBM Plex Sans Thai" pitchFamily="34" charset="-122"/>
                           <a:cs typeface="IBM Plex Sans Thai" pitchFamily="34" charset="-120"/>
                         </a:rPr>
-                        <a:t>30 นาที</a:t>
+                        <a:t>15 นาที</a:t>
                       </a:r>
                       <a:endParaRPr lang="en-US" sz="1600" dirty="0">
                         <a:latin typeface="IBM Plex Sans Thai" charset="0"/>
@@ -11010,7 +11782,7 @@
                           <a:ea typeface="IBM Plex Sans Thai" pitchFamily="34" charset="-122"/>
                           <a:cs typeface="IBM Plex Sans Thai" pitchFamily="34" charset="-120"/>
                         </a:rPr>
-                        <a:t>45 นาที</a:t>
+                        <a:t>15 นาที</a:t>
                       </a:r>
                       <a:endParaRPr lang="en-US" sz="1600" dirty="0">
                         <a:latin typeface="IBM Plex Sans Thai" charset="0"/>
@@ -11409,7 +12181,7 @@
 </file>
 
 <file path=ppt/slides/slide21.xml><?xml version="1.0" encoding="utf-8"?>
-<p:sld xmlns:a="http://schemas.openxmlformats.org/drawingml/2006/main" xmlns:r="http://schemas.openxmlformats.org/officeDocument/2006/relationships" xmlns:p="http://schemas.openxmlformats.org/presentationml/2006/main">
+<p:sld xmlns:a="http://schemas.openxmlformats.org/drawingml/2006/main" xmlns:r="http://schemas.openxmlformats.org/officeDocument/2006/relationships" xmlns:p="http://schemas.openxmlformats.org/presentationml/2006/main" showMasterSp="0">
   <p:cSld name="Slide 21">
     <p:bg>
       <p:bgPr>
@@ -11541,7 +12313,182 @@
           </a:p>
         </p:txBody>
       </p:sp>
+      <p:sp>
+        <p:nvSpPr>
+          <p:cNvPr id="5" name="Footer Rule"/>
+          <p:cNvSpPr/>
+          <p:nvPr/>
+        </p:nvSpPr>
+        <p:spPr>
+          <a:xfrm>
+            <a:off x="731520" y="6254496"/>
+            <a:ext cx="10728929" cy="20116"/>
+          </a:xfrm>
+          <a:prstGeom prst="rect">
+            <a:avLst/>
+          </a:prstGeom>
+          <a:solidFill>
+            <a:srgbClr val="2F5A47"/>
+          </a:solidFill>
+          <a:ln>
+            <a:noFill/>
+          </a:ln>
+        </p:spPr>
+        <p:txBody>
+          <a:bodyPr/>
+          <a:lstStyle/>
+          <a:p>
+            <a:endParaRPr lang="en-TH"/>
+          </a:p>
+        </p:txBody>
+      </p:sp>
+      <p:sp>
+        <p:nvSpPr>
+          <p:cNvPr id="6" name="Footer Accent"/>
+          <p:cNvSpPr/>
+          <p:nvPr/>
+        </p:nvSpPr>
+        <p:spPr>
+          <a:xfrm>
+            <a:off x="731519" y="6254495"/>
+            <a:ext cx="1375955" cy="45719"/>
+          </a:xfrm>
+          <a:prstGeom prst="rect">
+            <a:avLst/>
+          </a:prstGeom>
+          <a:solidFill>
+            <a:srgbClr val="ADC32B"/>
+          </a:solidFill>
+          <a:ln>
+            <a:noFill/>
+          </a:ln>
+        </p:spPr>
+        <p:txBody>
+          <a:bodyPr/>
+          <a:lstStyle/>
+          <a:p>
+            <a:endParaRPr lang="en-TH"/>
+          </a:p>
+        </p:txBody>
+      </p:sp>
+      <p:sp>
+        <p:nvSpPr>
+          <p:cNvPr id="8" name="Footer Company"/>
+          <p:cNvSpPr txBox="1"/>
+          <p:nvPr/>
+        </p:nvSpPr>
+        <p:spPr>
+          <a:xfrm>
+            <a:off x="1060704" y="6451092"/>
+            <a:ext cx="3657600" cy="219456"/>
+          </a:xfrm>
+          <a:prstGeom prst="rect">
+            <a:avLst/>
+          </a:prstGeom>
+          <a:noFill/>
+        </p:spPr>
+        <p:txBody>
+          <a:bodyPr wrap="square" lIns="0" tIns="0" rIns="0" bIns="0" anchor="t"/>
+          <a:lstStyle/>
+          <a:p>
+            <a:pPr algn="l">
+              <a:buNone/>
+            </a:pPr>
+            <a:r>
+              <a:rPr lang="en-US" sz="950" b="1" spc="40" dirty="0">
+                <a:solidFill>
+                  <a:srgbClr val="AEDBC0"/>
+                </a:solidFill>
+                <a:latin typeface="IBM Plex Sans Thai"/>
+                <a:ea typeface="IBM Plex Sans Thai"/>
+                <a:cs typeface="IBM Plex Sans Thai"/>
+              </a:rPr>
+              <a:t>Go Along Co., Ltd.</a:t>
+            </a:r>
+          </a:p>
+        </p:txBody>
+      </p:sp>
+      <p:sp>
+        <p:nvSpPr>
+          <p:cNvPr id="9" name="Footer Page Number"/>
+          <p:cNvSpPr txBox="1"/>
+          <p:nvPr/>
+        </p:nvSpPr>
+        <p:spPr>
+          <a:xfrm>
+            <a:off x="9997409" y="6451092"/>
+            <a:ext cx="1463040" cy="219456"/>
+          </a:xfrm>
+          <a:prstGeom prst="rect">
+            <a:avLst/>
+          </a:prstGeom>
+          <a:noFill/>
+        </p:spPr>
+        <p:txBody>
+          <a:bodyPr wrap="square" lIns="0" tIns="0" rIns="0" bIns="0" anchor="t"/>
+          <a:lstStyle/>
+          <a:p>
+            <a:pPr algn="r">
+              <a:buNone/>
+            </a:pPr>
+            <a:fld id="{6F1C2A3B-9D4E-4B8A-A1C2-3E5F7A9B0C11}" type="slidenum">
+              <a:rPr lang="en-US" sz="950" b="1" spc="40" dirty="0">
+                <a:solidFill>
+                  <a:srgbClr val="8FA89B"/>
+                </a:solidFill>
+                <a:latin typeface="IBM Plex Sans Thai"/>
+                <a:ea typeface="IBM Plex Sans Thai"/>
+                <a:cs typeface="IBM Plex Sans Thai"/>
+              </a:rPr>
+              <a:t>21</a:t>
+            </a:fld>
+            <a:endParaRPr lang="en-US" sz="950" b="1" spc="40" dirty="0">
+              <a:solidFill>
+                <a:srgbClr val="8FA89B"/>
+              </a:solidFill>
+              <a:latin typeface="IBM Plex Sans Thai"/>
+              <a:ea typeface="IBM Plex Sans Thai"/>
+              <a:cs typeface="IBM Plex Sans Thai"/>
+            </a:endParaRPr>
+          </a:p>
+        </p:txBody>
+      </p:sp>
+      <p:pic>
+        <p:nvPicPr>
+          <p:cNvPr id="10" name="Copied Picture 10" descr="logo_goalong.png">
+            <a:extLst>
+              <a:ext uri="{FF2B5EF4-FFF2-40B4-BE49-F238E27FC236}">
+                <a16:creationId xmlns:a16="http://schemas.microsoft.com/office/drawing/2014/main" id="{2DEA5F1B-9994-DFF5-AE5D-619590137917}"/>
+              </a:ext>
+            </a:extLst>
+          </p:cNvPr>
+          <p:cNvPicPr>
+            <a:picLocks noChangeAspect="1"/>
+          </p:cNvPicPr>
+          <p:nvPr/>
+        </p:nvPicPr>
+        <p:blipFill>
+          <a:blip r:embed="rId3"/>
+          <a:stretch>
+            <a:fillRect/>
+          </a:stretch>
+        </p:blipFill>
+        <p:spPr>
+          <a:xfrm>
+            <a:off x="731520" y="6454648"/>
+            <a:ext cx="237744" cy="166699"/>
+          </a:xfrm>
+          <a:prstGeom prst="rect">
+            <a:avLst/>
+          </a:prstGeom>
+        </p:spPr>
+      </p:pic>
     </p:spTree>
+    <p:extLst>
+      <p:ext uri="{BB962C8B-B14F-4D97-AF65-F5344CB8AC3E}">
+        <p14:creationId xmlns:p14="http://schemas.microsoft.com/office/powerpoint/2010/main" val="4056134458"/>
+      </p:ext>
+    </p:extLst>
   </p:cSld>
   <p:clrMapOvr>
     <a:masterClrMapping/>
@@ -13463,7 +14410,7 @@
 </file>
 
 <file path=ppt/slides/slide25.xml><?xml version="1.0" encoding="utf-8"?>
-<p:sld xmlns:a="http://schemas.openxmlformats.org/drawingml/2006/main" xmlns:r="http://schemas.openxmlformats.org/officeDocument/2006/relationships" xmlns:p="http://schemas.openxmlformats.org/presentationml/2006/main">
+<p:sld xmlns:a="http://schemas.openxmlformats.org/drawingml/2006/main" xmlns:r="http://schemas.openxmlformats.org/officeDocument/2006/relationships" xmlns:p="http://schemas.openxmlformats.org/presentationml/2006/main" showMasterSp="0">
   <p:cSld name="Slide 25">
     <p:bg>
       <p:bgPr>
@@ -13595,7 +14542,182 @@
           </a:p>
         </p:txBody>
       </p:sp>
+      <p:sp>
+        <p:nvSpPr>
+          <p:cNvPr id="5" name="Footer Rule"/>
+          <p:cNvSpPr/>
+          <p:nvPr/>
+        </p:nvSpPr>
+        <p:spPr>
+          <a:xfrm>
+            <a:off x="731520" y="6254496"/>
+            <a:ext cx="10728929" cy="20116"/>
+          </a:xfrm>
+          <a:prstGeom prst="rect">
+            <a:avLst/>
+          </a:prstGeom>
+          <a:solidFill>
+            <a:srgbClr val="2F5A47"/>
+          </a:solidFill>
+          <a:ln>
+            <a:noFill/>
+          </a:ln>
+        </p:spPr>
+        <p:txBody>
+          <a:bodyPr/>
+          <a:lstStyle/>
+          <a:p>
+            <a:endParaRPr lang="en-TH"/>
+          </a:p>
+        </p:txBody>
+      </p:sp>
+      <p:sp>
+        <p:nvSpPr>
+          <p:cNvPr id="6" name="Footer Accent"/>
+          <p:cNvSpPr/>
+          <p:nvPr/>
+        </p:nvSpPr>
+        <p:spPr>
+          <a:xfrm>
+            <a:off x="731519" y="6254495"/>
+            <a:ext cx="1375955" cy="45719"/>
+          </a:xfrm>
+          <a:prstGeom prst="rect">
+            <a:avLst/>
+          </a:prstGeom>
+          <a:solidFill>
+            <a:srgbClr val="ADC32B"/>
+          </a:solidFill>
+          <a:ln>
+            <a:noFill/>
+          </a:ln>
+        </p:spPr>
+        <p:txBody>
+          <a:bodyPr/>
+          <a:lstStyle/>
+          <a:p>
+            <a:endParaRPr lang="en-TH"/>
+          </a:p>
+        </p:txBody>
+      </p:sp>
+      <p:sp>
+        <p:nvSpPr>
+          <p:cNvPr id="8" name="Footer Company"/>
+          <p:cNvSpPr txBox="1"/>
+          <p:nvPr/>
+        </p:nvSpPr>
+        <p:spPr>
+          <a:xfrm>
+            <a:off x="1060704" y="6451092"/>
+            <a:ext cx="3657600" cy="219456"/>
+          </a:xfrm>
+          <a:prstGeom prst="rect">
+            <a:avLst/>
+          </a:prstGeom>
+          <a:noFill/>
+        </p:spPr>
+        <p:txBody>
+          <a:bodyPr wrap="square" lIns="0" tIns="0" rIns="0" bIns="0" anchor="t"/>
+          <a:lstStyle/>
+          <a:p>
+            <a:pPr algn="l">
+              <a:buNone/>
+            </a:pPr>
+            <a:r>
+              <a:rPr lang="en-US" sz="950" b="1" spc="40" dirty="0">
+                <a:solidFill>
+                  <a:srgbClr val="AEDBC0"/>
+                </a:solidFill>
+                <a:latin typeface="IBM Plex Sans Thai"/>
+                <a:ea typeface="IBM Plex Sans Thai"/>
+                <a:cs typeface="IBM Plex Sans Thai"/>
+              </a:rPr>
+              <a:t>Go Along Co., Ltd.</a:t>
+            </a:r>
+          </a:p>
+        </p:txBody>
+      </p:sp>
+      <p:sp>
+        <p:nvSpPr>
+          <p:cNvPr id="9" name="Footer Page Number"/>
+          <p:cNvSpPr txBox="1"/>
+          <p:nvPr/>
+        </p:nvSpPr>
+        <p:spPr>
+          <a:xfrm>
+            <a:off x="9997409" y="6451092"/>
+            <a:ext cx="1463040" cy="219456"/>
+          </a:xfrm>
+          <a:prstGeom prst="rect">
+            <a:avLst/>
+          </a:prstGeom>
+          <a:noFill/>
+        </p:spPr>
+        <p:txBody>
+          <a:bodyPr wrap="square" lIns="0" tIns="0" rIns="0" bIns="0" anchor="t"/>
+          <a:lstStyle/>
+          <a:p>
+            <a:pPr algn="r">
+              <a:buNone/>
+            </a:pPr>
+            <a:fld id="{6F1C2A3B-9D4E-4B8A-A1C2-3E5F7A9B0C11}" type="slidenum">
+              <a:rPr lang="en-US" sz="950" b="1" spc="40" dirty="0">
+                <a:solidFill>
+                  <a:srgbClr val="8FA89B"/>
+                </a:solidFill>
+                <a:latin typeface="IBM Plex Sans Thai"/>
+                <a:ea typeface="IBM Plex Sans Thai"/>
+                <a:cs typeface="IBM Plex Sans Thai"/>
+              </a:rPr>
+              <a:t>25</a:t>
+            </a:fld>
+            <a:endParaRPr lang="en-US" sz="950" b="1" spc="40" dirty="0">
+              <a:solidFill>
+                <a:srgbClr val="8FA89B"/>
+              </a:solidFill>
+              <a:latin typeface="IBM Plex Sans Thai"/>
+              <a:ea typeface="IBM Plex Sans Thai"/>
+              <a:cs typeface="IBM Plex Sans Thai"/>
+            </a:endParaRPr>
+          </a:p>
+        </p:txBody>
+      </p:sp>
+      <p:pic>
+        <p:nvPicPr>
+          <p:cNvPr id="10" name="Copied Picture 10" descr="logo_goalong.png">
+            <a:extLst>
+              <a:ext uri="{FF2B5EF4-FFF2-40B4-BE49-F238E27FC236}">
+                <a16:creationId xmlns:a16="http://schemas.microsoft.com/office/drawing/2014/main" id="{2DEA5F1B-9994-DFF5-AE5D-619590137917}"/>
+              </a:ext>
+            </a:extLst>
+          </p:cNvPr>
+          <p:cNvPicPr>
+            <a:picLocks noChangeAspect="1"/>
+          </p:cNvPicPr>
+          <p:nvPr/>
+        </p:nvPicPr>
+        <p:blipFill>
+          <a:blip r:embed="rId3"/>
+          <a:stretch>
+            <a:fillRect/>
+          </a:stretch>
+        </p:blipFill>
+        <p:spPr>
+          <a:xfrm>
+            <a:off x="731520" y="6454648"/>
+            <a:ext cx="237744" cy="166699"/>
+          </a:xfrm>
+          <a:prstGeom prst="rect">
+            <a:avLst/>
+          </a:prstGeom>
+        </p:spPr>
+      </p:pic>
     </p:spTree>
+    <p:extLst>
+      <p:ext uri="{BB962C8B-B14F-4D97-AF65-F5344CB8AC3E}">
+        <p14:creationId xmlns:p14="http://schemas.microsoft.com/office/powerpoint/2010/main" val="29627851"/>
+      </p:ext>
+    </p:extLst>
   </p:cSld>
   <p:clrMapOvr>
     <a:masterClrMapping/>
@@ -13637,7 +14759,7 @@
         <p:spPr>
           <a:xfrm>
             <a:off x="685800" y="457200"/>
-            <a:ext cx="2971800" cy="5943600"/>
+            <a:ext cx="2806699" cy="5613400"/>
           </a:xfrm>
           <a:prstGeom prst="roundRect">
             <a:avLst>
@@ -13685,8 +14807,8 @@
         </p:blipFill>
         <p:spPr>
           <a:xfrm>
-            <a:off x="758952" y="675953"/>
-            <a:ext cx="2825496" cy="5506095"/>
+            <a:off x="754888" y="663800"/>
+            <a:ext cx="2668523" cy="5200200"/>
           </a:xfrm>
           <a:prstGeom prst="rect">
             <a:avLst/>
@@ -13702,7 +14824,7 @@
         <p:spPr>
           <a:xfrm>
             <a:off x="3886200" y="457200"/>
-            <a:ext cx="2971800" cy="5943600"/>
+            <a:ext cx="2806699" cy="5613400"/>
           </a:xfrm>
           <a:prstGeom prst="roundRect">
             <a:avLst>
@@ -13750,8 +14872,8 @@
         </p:blipFill>
         <p:spPr>
           <a:xfrm>
-            <a:off x="3959352" y="675953"/>
-            <a:ext cx="2825496" cy="5506095"/>
+            <a:off x="3955288" y="663800"/>
+            <a:ext cx="2668523" cy="5200200"/>
           </a:xfrm>
           <a:prstGeom prst="rect">
             <a:avLst/>
@@ -13998,7 +15120,7 @@
         <p:spPr>
           <a:xfrm>
             <a:off x="685800" y="457200"/>
-            <a:ext cx="3017520" cy="5943600"/>
+            <a:ext cx="2849879" cy="5613400"/>
           </a:xfrm>
           <a:prstGeom prst="roundRect">
             <a:avLst>
@@ -14046,8 +15168,8 @@
         </p:blipFill>
         <p:spPr>
           <a:xfrm>
-            <a:off x="815935" y="530352"/>
-            <a:ext cx="2757251" cy="5797296"/>
+            <a:off x="808705" y="526288"/>
+            <a:ext cx="2604070" cy="5475224"/>
           </a:xfrm>
           <a:prstGeom prst="rect">
             <a:avLst/>
@@ -16010,7 +17132,7 @@
 </file>
 
 <file path=ppt/slides/slide29.xml><?xml version="1.0" encoding="utf-8"?>
-<p:sld xmlns:a="http://schemas.openxmlformats.org/drawingml/2006/main" xmlns:r="http://schemas.openxmlformats.org/officeDocument/2006/relationships" xmlns:p="http://schemas.openxmlformats.org/presentationml/2006/main">
+<p:sld xmlns:a="http://schemas.openxmlformats.org/drawingml/2006/main" xmlns:r="http://schemas.openxmlformats.org/officeDocument/2006/relationships" xmlns:p="http://schemas.openxmlformats.org/presentationml/2006/main" showMasterSp="0">
   <p:cSld name="Slide 29">
     <p:bg>
       <p:bgPr>
@@ -16460,7 +17582,182 @@
           </a:p>
         </p:txBody>
       </p:sp>
+      <p:sp>
+        <p:nvSpPr>
+          <p:cNvPr id="14" name="Footer Rule"/>
+          <p:cNvSpPr/>
+          <p:nvPr/>
+        </p:nvSpPr>
+        <p:spPr>
+          <a:xfrm>
+            <a:off x="731520" y="6254496"/>
+            <a:ext cx="10728929" cy="20116"/>
+          </a:xfrm>
+          <a:prstGeom prst="rect">
+            <a:avLst/>
+          </a:prstGeom>
+          <a:solidFill>
+            <a:srgbClr val="2F5A47"/>
+          </a:solidFill>
+          <a:ln>
+            <a:noFill/>
+          </a:ln>
+        </p:spPr>
+        <p:txBody>
+          <a:bodyPr/>
+          <a:lstStyle/>
+          <a:p>
+            <a:endParaRPr lang="en-TH"/>
+          </a:p>
+        </p:txBody>
+      </p:sp>
+      <p:sp>
+        <p:nvSpPr>
+          <p:cNvPr id="15" name="Footer Accent"/>
+          <p:cNvSpPr/>
+          <p:nvPr/>
+        </p:nvSpPr>
+        <p:spPr>
+          <a:xfrm>
+            <a:off x="731519" y="6254495"/>
+            <a:ext cx="1375955" cy="45719"/>
+          </a:xfrm>
+          <a:prstGeom prst="rect">
+            <a:avLst/>
+          </a:prstGeom>
+          <a:solidFill>
+            <a:srgbClr val="ADC32B"/>
+          </a:solidFill>
+          <a:ln>
+            <a:noFill/>
+          </a:ln>
+        </p:spPr>
+        <p:txBody>
+          <a:bodyPr/>
+          <a:lstStyle/>
+          <a:p>
+            <a:endParaRPr lang="en-TH"/>
+          </a:p>
+        </p:txBody>
+      </p:sp>
+      <p:sp>
+        <p:nvSpPr>
+          <p:cNvPr id="17" name="Footer Company"/>
+          <p:cNvSpPr txBox="1"/>
+          <p:nvPr/>
+        </p:nvSpPr>
+        <p:spPr>
+          <a:xfrm>
+            <a:off x="1060704" y="6451092"/>
+            <a:ext cx="3657600" cy="219456"/>
+          </a:xfrm>
+          <a:prstGeom prst="rect">
+            <a:avLst/>
+          </a:prstGeom>
+          <a:noFill/>
+        </p:spPr>
+        <p:txBody>
+          <a:bodyPr wrap="square" lIns="0" tIns="0" rIns="0" bIns="0" anchor="t"/>
+          <a:lstStyle/>
+          <a:p>
+            <a:pPr algn="l">
+              <a:buNone/>
+            </a:pPr>
+            <a:r>
+              <a:rPr lang="en-US" sz="950" b="1" spc="40" dirty="0">
+                <a:solidFill>
+                  <a:srgbClr val="AEDBC0"/>
+                </a:solidFill>
+                <a:latin typeface="IBM Plex Sans Thai"/>
+                <a:ea typeface="IBM Plex Sans Thai"/>
+                <a:cs typeface="IBM Plex Sans Thai"/>
+              </a:rPr>
+              <a:t>Go Along Co., Ltd.</a:t>
+            </a:r>
+          </a:p>
+        </p:txBody>
+      </p:sp>
+      <p:sp>
+        <p:nvSpPr>
+          <p:cNvPr id="18" name="Footer Page Number"/>
+          <p:cNvSpPr txBox="1"/>
+          <p:nvPr/>
+        </p:nvSpPr>
+        <p:spPr>
+          <a:xfrm>
+            <a:off x="9997409" y="6451092"/>
+            <a:ext cx="1463040" cy="219456"/>
+          </a:xfrm>
+          <a:prstGeom prst="rect">
+            <a:avLst/>
+          </a:prstGeom>
+          <a:noFill/>
+        </p:spPr>
+        <p:txBody>
+          <a:bodyPr wrap="square" lIns="0" tIns="0" rIns="0" bIns="0" anchor="t"/>
+          <a:lstStyle/>
+          <a:p>
+            <a:pPr algn="r">
+              <a:buNone/>
+            </a:pPr>
+            <a:fld id="{6F1C2A3B-9D4E-4B8A-A1C2-3E5F7A9B0C11}" type="slidenum">
+              <a:rPr lang="en-US" sz="950" b="1" spc="40" dirty="0">
+                <a:solidFill>
+                  <a:srgbClr val="8FA89B"/>
+                </a:solidFill>
+                <a:latin typeface="IBM Plex Sans Thai"/>
+                <a:ea typeface="IBM Plex Sans Thai"/>
+                <a:cs typeface="IBM Plex Sans Thai"/>
+              </a:rPr>
+              <a:t>29</a:t>
+            </a:fld>
+            <a:endParaRPr lang="en-US" sz="950" b="1" spc="40" dirty="0">
+              <a:solidFill>
+                <a:srgbClr val="8FA89B"/>
+              </a:solidFill>
+              <a:latin typeface="IBM Plex Sans Thai"/>
+              <a:ea typeface="IBM Plex Sans Thai"/>
+              <a:cs typeface="IBM Plex Sans Thai"/>
+            </a:endParaRPr>
+          </a:p>
+        </p:txBody>
+      </p:sp>
+      <p:pic>
+        <p:nvPicPr>
+          <p:cNvPr id="19" name="Copied Picture 19" descr="logo_goalong.png">
+            <a:extLst>
+              <a:ext uri="{FF2B5EF4-FFF2-40B4-BE49-F238E27FC236}">
+                <a16:creationId xmlns:a16="http://schemas.microsoft.com/office/drawing/2014/main" id="{2DEA5F1B-9994-DFF5-AE5D-619590137917}"/>
+              </a:ext>
+            </a:extLst>
+          </p:cNvPr>
+          <p:cNvPicPr>
+            <a:picLocks noChangeAspect="1"/>
+          </p:cNvPicPr>
+          <p:nvPr/>
+        </p:nvPicPr>
+        <p:blipFill>
+          <a:blip r:embed="rId3"/>
+          <a:stretch>
+            <a:fillRect/>
+          </a:stretch>
+        </p:blipFill>
+        <p:spPr>
+          <a:xfrm>
+            <a:off x="731520" y="6454648"/>
+            <a:ext cx="237744" cy="166699"/>
+          </a:xfrm>
+          <a:prstGeom prst="rect">
+            <a:avLst/>
+          </a:prstGeom>
+        </p:spPr>
+      </p:pic>
     </p:spTree>
+    <p:extLst>
+      <p:ext uri="{BB962C8B-B14F-4D97-AF65-F5344CB8AC3E}">
+        <p14:creationId xmlns:p14="http://schemas.microsoft.com/office/powerpoint/2010/main" val="4087211168"/>
+      </p:ext>
+    </p:extLst>
   </p:cSld>
   <p:clrMapOvr>
     <a:masterClrMapping/>
@@ -20884,7 +22181,7 @@
         <p:spPr>
           <a:xfrm>
             <a:off x="685800" y="457200"/>
-            <a:ext cx="3291840" cy="5943600"/>
+            <a:ext cx="3108960" cy="5613400"/>
           </a:xfrm>
           <a:prstGeom prst="roundRect">
             <a:avLst>
@@ -20932,8 +22229,8 @@
         </p:blipFill>
         <p:spPr>
           <a:xfrm>
-            <a:off x="758952" y="711606"/>
-            <a:ext cx="3145536" cy="5434787"/>
+            <a:off x="754888" y="697472"/>
+            <a:ext cx="2970784" cy="5132854"/>
           </a:xfrm>
           <a:prstGeom prst="rect">
             <a:avLst/>
@@ -21212,6 +22509,11 @@
         </p:txBody>
       </p:sp>
     </p:spTree>
+    <p:extLst>
+      <p:ext uri="{BB962C8B-B14F-4D97-AF65-F5344CB8AC3E}">
+        <p14:creationId xmlns:p14="http://schemas.microsoft.com/office/powerpoint/2010/main" val="3423487062"/>
+      </p:ext>
+    </p:extLst>
   </p:cSld>
   <p:clrMapOvr>
     <a:masterClrMapping/>
@@ -21220,7 +22522,7 @@
 </file>
 
 <file path=ppt/slides/slide7.xml><?xml version="1.0" encoding="utf-8"?>
-<p:sld xmlns:a="http://schemas.openxmlformats.org/drawingml/2006/main" xmlns:r="http://schemas.openxmlformats.org/officeDocument/2006/relationships" xmlns:p="http://schemas.openxmlformats.org/presentationml/2006/main">
+<p:sld xmlns:a="http://schemas.openxmlformats.org/drawingml/2006/main" xmlns:r="http://schemas.openxmlformats.org/officeDocument/2006/relationships" xmlns:p="http://schemas.openxmlformats.org/presentationml/2006/main" showMasterSp="0">
   <p:cSld name="Slide 7">
     <p:bg>
       <p:bgPr>
@@ -21352,7 +22654,182 @@
           </a:p>
         </p:txBody>
       </p:sp>
+      <p:sp>
+        <p:nvSpPr>
+          <p:cNvPr id="5" name="Footer Rule"/>
+          <p:cNvSpPr/>
+          <p:nvPr/>
+        </p:nvSpPr>
+        <p:spPr>
+          <a:xfrm>
+            <a:off x="731520" y="6254496"/>
+            <a:ext cx="10728929" cy="20116"/>
+          </a:xfrm>
+          <a:prstGeom prst="rect">
+            <a:avLst/>
+          </a:prstGeom>
+          <a:solidFill>
+            <a:srgbClr val="2F5A47"/>
+          </a:solidFill>
+          <a:ln>
+            <a:noFill/>
+          </a:ln>
+        </p:spPr>
+        <p:txBody>
+          <a:bodyPr/>
+          <a:lstStyle/>
+          <a:p>
+            <a:endParaRPr lang="en-TH"/>
+          </a:p>
+        </p:txBody>
+      </p:sp>
+      <p:sp>
+        <p:nvSpPr>
+          <p:cNvPr id="6" name="Footer Accent"/>
+          <p:cNvSpPr/>
+          <p:nvPr/>
+        </p:nvSpPr>
+        <p:spPr>
+          <a:xfrm>
+            <a:off x="731519" y="6254495"/>
+            <a:ext cx="1375955" cy="45719"/>
+          </a:xfrm>
+          <a:prstGeom prst="rect">
+            <a:avLst/>
+          </a:prstGeom>
+          <a:solidFill>
+            <a:srgbClr val="ADC32B"/>
+          </a:solidFill>
+          <a:ln>
+            <a:noFill/>
+          </a:ln>
+        </p:spPr>
+        <p:txBody>
+          <a:bodyPr/>
+          <a:lstStyle/>
+          <a:p>
+            <a:endParaRPr lang="en-TH"/>
+          </a:p>
+        </p:txBody>
+      </p:sp>
+      <p:sp>
+        <p:nvSpPr>
+          <p:cNvPr id="8" name="Footer Company"/>
+          <p:cNvSpPr txBox="1"/>
+          <p:nvPr/>
+        </p:nvSpPr>
+        <p:spPr>
+          <a:xfrm>
+            <a:off x="1060704" y="6451092"/>
+            <a:ext cx="3657600" cy="219456"/>
+          </a:xfrm>
+          <a:prstGeom prst="rect">
+            <a:avLst/>
+          </a:prstGeom>
+          <a:noFill/>
+        </p:spPr>
+        <p:txBody>
+          <a:bodyPr wrap="square" lIns="0" tIns="0" rIns="0" bIns="0" anchor="t"/>
+          <a:lstStyle/>
+          <a:p>
+            <a:pPr algn="l">
+              <a:buNone/>
+            </a:pPr>
+            <a:r>
+              <a:rPr lang="en-US" sz="950" b="1" spc="40" dirty="0">
+                <a:solidFill>
+                  <a:srgbClr val="AEDBC0"/>
+                </a:solidFill>
+                <a:latin typeface="IBM Plex Sans Thai"/>
+                <a:ea typeface="IBM Plex Sans Thai"/>
+                <a:cs typeface="IBM Plex Sans Thai"/>
+              </a:rPr>
+              <a:t>Go Along Co., Ltd.</a:t>
+            </a:r>
+          </a:p>
+        </p:txBody>
+      </p:sp>
+      <p:sp>
+        <p:nvSpPr>
+          <p:cNvPr id="9" name="Footer Page Number"/>
+          <p:cNvSpPr txBox="1"/>
+          <p:nvPr/>
+        </p:nvSpPr>
+        <p:spPr>
+          <a:xfrm>
+            <a:off x="9997409" y="6451092"/>
+            <a:ext cx="1463040" cy="219456"/>
+          </a:xfrm>
+          <a:prstGeom prst="rect">
+            <a:avLst/>
+          </a:prstGeom>
+          <a:noFill/>
+        </p:spPr>
+        <p:txBody>
+          <a:bodyPr wrap="square" lIns="0" tIns="0" rIns="0" bIns="0" anchor="t"/>
+          <a:lstStyle/>
+          <a:p>
+            <a:pPr algn="r">
+              <a:buNone/>
+            </a:pPr>
+            <a:fld id="{6F1C2A3B-9D4E-4B8A-A1C2-3E5F7A9B0C11}" type="slidenum">
+              <a:rPr lang="en-US" sz="950" b="1" spc="40" dirty="0">
+                <a:solidFill>
+                  <a:srgbClr val="8FA89B"/>
+                </a:solidFill>
+                <a:latin typeface="IBM Plex Sans Thai"/>
+                <a:ea typeface="IBM Plex Sans Thai"/>
+                <a:cs typeface="IBM Plex Sans Thai"/>
+              </a:rPr>
+              <a:t>7</a:t>
+            </a:fld>
+            <a:endParaRPr lang="en-US" sz="950" b="1" spc="40" dirty="0">
+              <a:solidFill>
+                <a:srgbClr val="8FA89B"/>
+              </a:solidFill>
+              <a:latin typeface="IBM Plex Sans Thai"/>
+              <a:ea typeface="IBM Plex Sans Thai"/>
+              <a:cs typeface="IBM Plex Sans Thai"/>
+            </a:endParaRPr>
+          </a:p>
+        </p:txBody>
+      </p:sp>
+      <p:pic>
+        <p:nvPicPr>
+          <p:cNvPr id="10" name="Copied Picture 10" descr="logo_goalong.png">
+            <a:extLst>
+              <a:ext uri="{FF2B5EF4-FFF2-40B4-BE49-F238E27FC236}">
+                <a16:creationId xmlns:a16="http://schemas.microsoft.com/office/drawing/2014/main" id="{2DEA5F1B-9994-DFF5-AE5D-619590137917}"/>
+              </a:ext>
+            </a:extLst>
+          </p:cNvPr>
+          <p:cNvPicPr>
+            <a:picLocks noChangeAspect="1"/>
+          </p:cNvPicPr>
+          <p:nvPr/>
+        </p:nvPicPr>
+        <p:blipFill>
+          <a:blip r:embed="rId3"/>
+          <a:stretch>
+            <a:fillRect/>
+          </a:stretch>
+        </p:blipFill>
+        <p:spPr>
+          <a:xfrm>
+            <a:off x="731520" y="6454648"/>
+            <a:ext cx="237744" cy="166699"/>
+          </a:xfrm>
+          <a:prstGeom prst="rect">
+            <a:avLst/>
+          </a:prstGeom>
+        </p:spPr>
+      </p:pic>
     </p:spTree>
+    <p:extLst>
+      <p:ext uri="{BB962C8B-B14F-4D97-AF65-F5344CB8AC3E}">
+        <p14:creationId xmlns:p14="http://schemas.microsoft.com/office/powerpoint/2010/main" val="2409813176"/>
+      </p:ext>
+    </p:extLst>
   </p:cSld>
   <p:clrMapOvr>
     <a:masterClrMapping/>
@@ -22208,7 +23685,7 @@
 </file>
 
 <file path=ppt/theme/theme1.xml><?xml version="1.0" encoding="utf-8"?>
-<a:theme xmlns:a="http://schemas.openxmlformats.org/drawingml/2006/main" name="Fameline [1791946547944]">
+<a:theme xmlns:a="http://schemas.openxmlformats.org/drawingml/2006/main" name="Fameline [1792054786296]">
   <a:themeElements>
     <a:clrScheme name="Fameline">
       <a:dk1>

--- a/docs/training/Fameline-Dock-Queue-อบรมผู้ใช้งาน.pptx
+++ b/docs/training/Fameline-Dock-Queue-อบรมผู้ใช้งาน.pptx
@@ -1333,9 +1333,41 @@
           <a:lstStyle/>
           <a:p>
             <a:r>
+              <a:rPr lang="th-TH" dirty="0"/>
+              <a:t>บทบาทและหัวข้อ การทำงาน</a:t>
+            </a:r>
+            <a:br>
               <a:rPr lang="en-US" dirty="0"/>
-              <a:t>ช่วง 1 และ 5 ทุกคนเข้า ช่วง 2-4 เลือกตามหน้าที่ อบรมรวมห้องเดียวประมาณ 3 ชั่วโมงรวมพัก มีคู่มือ PDF 7 เล่ม แยกตามบทบาท</a:t>
-            </a:r>
+            </a:br>
+            <a:br>
+              <a:rPr lang="en-US" dirty="0"/>
+            </a:br>
+            <a:r>
+              <a:rPr lang="th-TH" dirty="0"/>
+              <a:t>ฝ่ายขาย </a:t>
+            </a:r>
+            <a:br>
+              <a:rPr lang="th-TH" dirty="0"/>
+            </a:br>
+            <a:r>
+              <a:rPr lang="th-TH" dirty="0"/>
+              <a:t>ฝ่ายจัดซื้อ</a:t>
+            </a:r>
+            <a:br>
+              <a:rPr lang="th-TH" dirty="0"/>
+            </a:br>
+            <a:r>
+              <a:rPr lang="th-TH" dirty="0"/>
+              <a:t>ทีมคลัง</a:t>
+            </a:r>
+            <a:br>
+              <a:rPr lang="th-TH" dirty="0"/>
+            </a:br>
+            <a:r>
+              <a:rPr lang="th-TH" dirty="0"/>
+              <a:t>ผู้จัดการ </a:t>
+            </a:r>
+            <a:endParaRPr lang="en-US" dirty="0"/>
           </a:p>
         </p:txBody>
       </p:sp>
@@ -2290,8 +2322,82 @@
           <a:lstStyle/>
           <a:p>
             <a:r>
+              <a:rPr lang="th-TH" dirty="0" err="1"/>
+              <a:t>f</a:t>
+            </a:r>
+            <a:r>
               <a:rPr lang="en-US" dirty="0"/>
-              <a:t>เล่าเส้นทางเดียวให้ทุกคนเห็นภาพรวมก่อน ขั้น 1-2 ฝ่ายขาย/จัดซื้อ ขั้น 3 ลูกค้าหรือผู้ขายทำเองผ่านลิงก์ ไม่ต้องล็อกอิน ขั้น 4-7 ทีมคลัง รถที่มาโดยไม่ได้จองใช้ Walk-in ซึ่งรวมขั้น 3-5 ไว้ในหน้าต่างเดียว PO ไม่มีการตรวจการชำระเงิน</a:t>
+              <a:t>low </a:t>
+            </a:r>
+            <a:r>
+              <a:rPr lang="th-TH" dirty="0"/>
+              <a:t>การทำงาน ของระบบจองคิว </a:t>
+            </a:r>
+            <a:br>
+              <a:rPr lang="th-TH" dirty="0"/>
+            </a:br>
+            <a:r>
+              <a:rPr lang="th-TH" dirty="0"/>
+              <a:t>เริ่มจาก คีย์ </a:t>
+            </a:r>
+            <a:r>
+              <a:rPr lang="en-US" dirty="0"/>
+              <a:t>so </a:t>
+            </a:r>
+            <a:r>
+              <a:rPr lang="th-TH" dirty="0"/>
+              <a:t>หรือ </a:t>
+            </a:r>
+            <a:r>
+              <a:rPr lang="en-US" dirty="0"/>
+              <a:t>po </a:t>
+            </a:r>
+            <a:r>
+              <a:rPr lang="th-TH" dirty="0"/>
+              <a:t>จนถึงขึ้นลงของ ปิดงาน </a:t>
+            </a:r>
+          </a:p>
+          <a:p>
+            <a:r>
+              <a:rPr lang="en-US" dirty="0"/>
+              <a:t>1. </a:t>
+            </a:r>
+            <a:endParaRPr lang="th-TH" dirty="0"/>
+          </a:p>
+          <a:p>
+            <a:r>
+              <a:rPr lang="en-US" dirty="0"/>
+              <a:t>2.</a:t>
+            </a:r>
+          </a:p>
+          <a:p>
+            <a:r>
+              <a:rPr lang="en-US" dirty="0"/>
+              <a:t>3.</a:t>
+            </a:r>
+          </a:p>
+          <a:p>
+            <a:r>
+              <a:rPr lang="en-US" dirty="0"/>
+              <a:t>4.</a:t>
+            </a:r>
+          </a:p>
+          <a:p>
+            <a:r>
+              <a:rPr lang="en-US" dirty="0"/>
+              <a:t>5.</a:t>
+            </a:r>
+          </a:p>
+          <a:p>
+            <a:r>
+              <a:rPr lang="en-US" dirty="0"/>
+              <a:t>6.</a:t>
+            </a:r>
+          </a:p>
+          <a:p>
+            <a:r>
+              <a:rPr lang="en-US" dirty="0"/>
+              <a:t>7.</a:t>
             </a:r>
           </a:p>
         </p:txBody>
@@ -10111,7 +10217,7 @@
           <p:nvPr>
             <p:extLst>
               <p:ext uri="{D42A27DB-BD31-4B8C-83A1-F6EECF244321}">
-                <p14:modId xmlns:p14="http://schemas.microsoft.com/office/powerpoint/2010/main" val="4025420973"/>
+                <p14:modId xmlns:p14="http://schemas.microsoft.com/office/powerpoint/2010/main" val="1933075974"/>
               </p:ext>
             </p:extLst>
           </p:nvPr>
@@ -10300,15 +10406,15 @@
                         <a:buNone/>
                       </a:pPr>
                       <a:r>
-                        <a:rPr lang="en-US" sz="1600" b="1" dirty="0">
+                        <a:rPr lang="th-TH" sz="1600" b="1" dirty="0">
                           <a:solidFill>
                             <a:srgbClr val="0F2A1F"/>
                           </a:solidFill>
                           <a:latin typeface="IBM Plex Sans Thai" pitchFamily="34" charset="0"/>
-                          <a:ea typeface="IBM Plex Sans Thai" pitchFamily="34" charset="-122"/>
+                          <a:ea typeface="IBM Plex Sans Thai" charset="0"/>
                           <a:cs typeface="IBM Plex Sans Thai" pitchFamily="34" charset="-120"/>
                         </a:rPr>
-                        <a:t>ผู้เข้าอบรม</a:t>
+                        <a:t>บทบาท</a:t>
                       </a:r>
                       <a:endParaRPr lang="en-US" sz="1600" dirty="0">
                         <a:latin typeface="IBM Plex Sans Thai" charset="0"/>
@@ -13045,7 +13151,23 @@
                   <a:srgbClr val="0F2A1F"/>
                 </a:solidFill>
               </a:rPr>
-              <a:t>พนักงาน และสิทธิ์ 4 ระดับ</a:t>
+              <a:t>พนักงาน </a:t>
+            </a:r>
+            <a:r>
+              <a:rPr lang="en-US" sz="3200" b="1" dirty="0" err="1">
+                <a:solidFill>
+                  <a:srgbClr val="0F2A1F"/>
+                </a:solidFill>
+              </a:rPr>
+              <a:t>และสิทธิ์</a:t>
+            </a:r>
+            <a:r>
+              <a:rPr lang="th-TH" sz="3200" b="1" dirty="0">
+                <a:solidFill>
+                  <a:srgbClr val="0F2A1F"/>
+                </a:solidFill>
+              </a:rPr>
+              <a:t>การใช้งาน</a:t>
             </a:r>
             <a:endParaRPr lang="en-US" sz="3200" dirty="0"/>
           </a:p>
@@ -14500,7 +14622,7 @@
                   <a:srgbClr val="F4FAF6"/>
                 </a:solidFill>
               </a:rPr>
-              <a:t>LINE OA และ ฝึกปฏิบัติ</a:t>
+              <a:t>LINE OA</a:t>
             </a:r>
             <a:endParaRPr lang="en-US" sz="4800" dirty="0"/>
           </a:p>
